--- a/services/web-app/resources/thesis-essay-decks/lesson-4-introduction.pptx
+++ b/services/web-app/resources/thesis-essay-decks/lesson-4-introduction.pptx
@@ -10148,7 +10148,7 @@
               <a:buNone/>
             </a:pPr>
             <a:r>
-              <a:rPr lang="en-US" sz="1850" dirty="0">
+              <a:rPr lang="en-US" sz="1500" dirty="0">
                 <a:solidFill>
                   <a:srgbClr val="3C3828"/>
                 </a:solidFill>
@@ -10165,7 +10165,7 @@
               <a:buNone/>
             </a:pPr>
             <a:r>
-              <a:rPr lang="en-US" sz="1850" i="1" dirty="0">
+              <a:rPr lang="en-US" sz="1500" i="1" dirty="0">
                 <a:solidFill>
                   <a:srgbClr val="3C3828"/>
                 </a:solidFill>
@@ -10175,7 +10175,7 @@
               </a:rPr>
               <a:t>When schools fail to prioritize creativity in teaching, school becomes boring for both students and teachers, resulting in a lack of shared motivation, excitement, and accomplishment.</a:t>
             </a:r>
-            <a:endParaRPr lang="en-US" sz="1850" dirty="0"/>
+            <a:endParaRPr lang="en-US" sz="1500" dirty="0"/>
           </a:p>
         </p:txBody>
       </p:sp>
@@ -10456,7 +10456,7 @@
               <a:buNone/>
             </a:pPr>
             <a:r>
-              <a:rPr lang="en-US" sz="1850" dirty="0">
+              <a:rPr lang="en-US" sz="1700" dirty="0">
                 <a:solidFill>
                   <a:srgbClr val="3C3828"/>
                 </a:solidFill>
@@ -10473,7 +10473,7 @@
               <a:buNone/>
             </a:pPr>
             <a:r>
-              <a:rPr lang="en-US" sz="1850" i="1" dirty="0">
+              <a:rPr lang="en-US" sz="1700" i="1" dirty="0">
                 <a:solidFill>
                   <a:srgbClr val="3C3828"/>
                 </a:solidFill>
@@ -10483,7 +10483,7 @@
               </a:rPr>
               <a:t>When schools fail to prioritize creativity in teaching, school becomes boring for both students and teachers, resulting in a lack of shared motivation, excitement, and accomplishment.</a:t>
             </a:r>
-            <a:endParaRPr lang="en-US" sz="1850" dirty="0"/>
+            <a:endParaRPr lang="en-US" sz="1700" dirty="0"/>
           </a:p>
         </p:txBody>
       </p:sp>
@@ -11588,7 +11588,7 @@
               <a:buNone/>
             </a:pPr>
             <a:r>
-              <a:rPr lang="en-US" sz="1850" dirty="0">
+              <a:rPr lang="en-US" sz="1700" dirty="0">
                 <a:solidFill>
                   <a:srgbClr val="3C3828"/>
                 </a:solidFill>
@@ -11605,7 +11605,7 @@
               <a:buNone/>
             </a:pPr>
             <a:r>
-              <a:rPr lang="en-US" sz="1850" i="1" dirty="0">
+              <a:rPr lang="en-US" sz="1700" i="1" dirty="0">
                 <a:solidFill>
                   <a:srgbClr val="3C3828"/>
                 </a:solidFill>
@@ -11615,7 +11615,7 @@
               </a:rPr>
               <a:t>When schools fail to prioritize creativity in teaching, school becomes boring for both students and teachers, resulting in a lack of shared motivation, excitement, and accomplishment.</a:t>
             </a:r>
-            <a:endParaRPr lang="en-US" sz="1850" dirty="0"/>
+            <a:endParaRPr lang="en-US" sz="1700" dirty="0"/>
           </a:p>
         </p:txBody>
       </p:sp>
@@ -11896,7 +11896,7 @@
               <a:buNone/>
             </a:pPr>
             <a:r>
-              <a:rPr lang="en-US" sz="1850" dirty="0">
+              <a:rPr lang="en-US" sz="1500" dirty="0">
                 <a:solidFill>
                   <a:srgbClr val="3C3828"/>
                 </a:solidFill>
@@ -11913,7 +11913,7 @@
               <a:buNone/>
             </a:pPr>
             <a:r>
-              <a:rPr lang="en-US" sz="1850" i="1" dirty="0">
+              <a:rPr lang="en-US" sz="1500" i="1" dirty="0">
                 <a:solidFill>
                   <a:srgbClr val="3C3828"/>
                 </a:solidFill>
@@ -11923,7 +11923,7 @@
               </a:rPr>
               <a:t>When schools fail to prioritize creativity in teaching, school becomes boring for both students and teachers, resulting in a lack of shared motivation, excitement, and accomplishment.</a:t>
             </a:r>
-            <a:endParaRPr lang="en-US" sz="1850" dirty="0"/>
+            <a:endParaRPr lang="en-US" sz="1500" dirty="0"/>
           </a:p>
         </p:txBody>
       </p:sp>

--- a/services/web-app/resources/thesis-essay-decks/lesson-4-introduction.pptx
+++ b/services/web-app/resources/thesis-essay-decks/lesson-4-introduction.pptx
@@ -3245,7 +3245,7 @@
       </p:sp>
       <p:pic>
         <p:nvPicPr>
-          <p:cNvPr id="7" name="Image 0" descr="/home/user/yawp/services/web-app/scripts/thesis-essay-decks/assets/icons/lightbulb.png">    </p:cNvPr>
+          <p:cNvPr id="7" name="Image 0" descr="lightbulb icon">    </p:cNvPr>
           <p:cNvPicPr>
             <a:picLocks noChangeAspect="1"/>
           </p:cNvPicPr>
@@ -3294,7 +3294,7 @@
       </p:sp>
       <p:pic>
         <p:nvPicPr>
-          <p:cNvPr id="9" name="Image 1" descr="/home/user/yawp/services/web-app/scripts/thesis-essay-decks/assets/icons/puzzle.png">    </p:cNvPr>
+          <p:cNvPr id="9" name="Image 1" descr="puzzle icon">    </p:cNvPr>
           <p:cNvPicPr>
             <a:picLocks noChangeAspect="1"/>
           </p:cNvPicPr>
@@ -3343,7 +3343,7 @@
       </p:sp>
       <p:pic>
         <p:nvPicPr>
-          <p:cNvPr id="11" name="Image 2" descr="/home/user/yawp/services/web-app/scripts/thesis-essay-decks/assets/icons/thumbs.png">    </p:cNvPr>
+          <p:cNvPr id="11" name="Image 2" descr="thumbs icon">    </p:cNvPr>
           <p:cNvPicPr>
             <a:picLocks noChangeAspect="1"/>
           </p:cNvPicPr>
@@ -3913,7 +3913,7 @@
       </p:sp>
       <p:pic>
         <p:nvPicPr>
-          <p:cNvPr id="5" name="Image 0" descr="/home/user/yawp/services/web-app/scripts/thesis-essay-decks/assets/icons/puzzle.png">    </p:cNvPr>
+          <p:cNvPr id="5" name="Image 0" descr="puzzle icon">    </p:cNvPr>
           <p:cNvPicPr>
             <a:picLocks noChangeAspect="1"/>
           </p:cNvPicPr>
@@ -4849,7 +4849,7 @@
       </p:sp>
       <p:pic>
         <p:nvPicPr>
-          <p:cNvPr id="5" name="Image 0" descr="/home/user/yawp/services/web-app/scripts/thesis-essay-decks/assets/icons/puzzle.png">    </p:cNvPr>
+          <p:cNvPr id="5" name="Image 0" descr="puzzle icon">    </p:cNvPr>
           <p:cNvPicPr>
             <a:picLocks noChangeAspect="1"/>
           </p:cNvPicPr>
@@ -6058,7 +6058,7 @@
       </p:sp>
       <p:pic>
         <p:nvPicPr>
-          <p:cNvPr id="5" name="Image 0" descr="/home/user/yawp/services/web-app/scripts/thesis-essay-decks/assets/icons/puzzle.png">    </p:cNvPr>
+          <p:cNvPr id="5" name="Image 0" descr="puzzle icon">    </p:cNvPr>
           <p:cNvPicPr>
             <a:picLocks noChangeAspect="1"/>
           </p:cNvPicPr>
@@ -6798,7 +6798,7 @@
       </p:sp>
       <p:pic>
         <p:nvPicPr>
-          <p:cNvPr id="5" name="Image 0" descr="/home/user/yawp/services/web-app/scripts/thesis-essay-decks/assets/icons/puzzle.png">    </p:cNvPr>
+          <p:cNvPr id="5" name="Image 0" descr="puzzle icon">    </p:cNvPr>
           <p:cNvPicPr>
             <a:picLocks noChangeAspect="1"/>
           </p:cNvPicPr>
@@ -7775,7 +7775,7 @@
       </p:sp>
       <p:pic>
         <p:nvPicPr>
-          <p:cNvPr id="6" name="Image 0" descr="/home/user/yawp/services/web-app/scripts/thesis-essay-decks/assets/icons/lightbulb.png">    </p:cNvPr>
+          <p:cNvPr id="6" name="Image 0" descr="lightbulb icon">    </p:cNvPr>
           <p:cNvPicPr>
             <a:picLocks noChangeAspect="1"/>
           </p:cNvPicPr>
@@ -7824,7 +7824,7 @@
       </p:sp>
       <p:pic>
         <p:nvPicPr>
-          <p:cNvPr id="8" name="Image 1" descr="/home/user/yawp/services/web-app/scripts/thesis-essay-decks/assets/icons/puzzle.png">    </p:cNvPr>
+          <p:cNvPr id="8" name="Image 1" descr="puzzle icon">    </p:cNvPr>
           <p:cNvPicPr>
             <a:picLocks noChangeAspect="1"/>
           </p:cNvPicPr>
@@ -7873,7 +7873,7 @@
       </p:sp>
       <p:pic>
         <p:nvPicPr>
-          <p:cNvPr id="10" name="Image 2" descr="/home/user/yawp/services/web-app/scripts/thesis-essay-decks/assets/icons/thumbs.png">    </p:cNvPr>
+          <p:cNvPr id="10" name="Image 2" descr="thumbs icon">    </p:cNvPr>
           <p:cNvPicPr>
             <a:picLocks noChangeAspect="1"/>
           </p:cNvPicPr>
@@ -8329,7 +8329,7 @@
       </p:sp>
       <p:pic>
         <p:nvPicPr>
-          <p:cNvPr id="7" name="Image 0" descr="/home/user/yawp/services/web-app/scripts/thesis-essay-decks/assets/icons/lightbulb.png">    </p:cNvPr>
+          <p:cNvPr id="7" name="Image 0" descr="lightbulb icon">    </p:cNvPr>
           <p:cNvPicPr>
             <a:picLocks noChangeAspect="1"/>
           </p:cNvPicPr>
@@ -8378,7 +8378,7 @@
       </p:sp>
       <p:pic>
         <p:nvPicPr>
-          <p:cNvPr id="9" name="Image 1" descr="/home/user/yawp/services/web-app/scripts/thesis-essay-decks/assets/icons/puzzle.png">    </p:cNvPr>
+          <p:cNvPr id="9" name="Image 1" descr="puzzle icon">    </p:cNvPr>
           <p:cNvPicPr>
             <a:picLocks noChangeAspect="1"/>
           </p:cNvPicPr>
@@ -8427,7 +8427,7 @@
       </p:sp>
       <p:pic>
         <p:nvPicPr>
-          <p:cNvPr id="11" name="Image 2" descr="/home/user/yawp/services/web-app/scripts/thesis-essay-decks/assets/icons/thumbs.png">    </p:cNvPr>
+          <p:cNvPr id="11" name="Image 2" descr="thumbs icon">    </p:cNvPr>
           <p:cNvPicPr>
             <a:picLocks noChangeAspect="1"/>
           </p:cNvPicPr>
@@ -8802,7 +8802,7 @@
       </p:sp>
       <p:pic>
         <p:nvPicPr>
-          <p:cNvPr id="5" name="Image 0" descr="/home/user/yawp/services/web-app/scripts/thesis-essay-decks/assets/icons/thumbs.png">    </p:cNvPr>
+          <p:cNvPr id="5" name="Image 0" descr="thumbs icon">    </p:cNvPr>
           <p:cNvPicPr>
             <a:picLocks noChangeAspect="1"/>
           </p:cNvPicPr>
@@ -8912,12 +8912,6 @@
               </a:rPr>
               <a:t>Your introduction’s function is to </a:t>
             </a:r>
-            <a:pPr indent="0" marL="0">
-              <a:lnSpc>
-                <a:spcPct val="115000"/>
-              </a:lnSpc>
-              <a:buNone/>
-            </a:pPr>
             <a:r>
               <a:rPr lang="en-US" sz="3200" dirty="0">
                 <a:solidFill>
@@ -8932,12 +8926,6 @@
               </a:rPr>
               <a:t>welcome your reader</a:t>
             </a:r>
-            <a:pPr indent="0" marL="0">
-              <a:lnSpc>
-                <a:spcPct val="115000"/>
-              </a:lnSpc>
-              <a:buNone/>
-            </a:pPr>
             <a:r>
               <a:rPr lang="en-US" sz="3200" dirty="0">
                 <a:solidFill>
@@ -8949,12 +8937,6 @@
               </a:rPr>
               <a:t> into your discussion and to </a:t>
             </a:r>
-            <a:pPr indent="0" marL="0">
-              <a:lnSpc>
-                <a:spcPct val="115000"/>
-              </a:lnSpc>
-              <a:buNone/>
-            </a:pPr>
             <a:r>
               <a:rPr lang="en-US" sz="3200" dirty="0">
                 <a:solidFill>
@@ -9151,7 +9133,7 @@
       </p:sp>
       <p:pic>
         <p:nvPicPr>
-          <p:cNvPr id="5" name="Image 0" descr="/home/user/yawp/services/web-app/scripts/thesis-essay-decks/assets/icons/pencil.png">    </p:cNvPr>
+          <p:cNvPr id="5" name="Image 0" descr="pencil icon">    </p:cNvPr>
           <p:cNvPicPr>
             <a:picLocks noChangeAspect="1"/>
           </p:cNvPicPr>
@@ -10158,12 +10140,6 @@
               </a:rPr>
               <a:t>Ms. Rodriguez watches as 28 ninth graders stare blankly at their worksheets, the only sound the fluorescent lights humming overhead. She had once dreamed of inspiring young minds, but now finds herself mechanically walking through the same lesson plan she's used for five years. In the back row, students doodle in their notebooks and struggle to stay awake. Throughout the school, teachers click through PowerPoint slides and tell students to stop talking, while kids daydream and stare at the clock. This scene plays out in classrooms across the country, where both educators and students have lost the spark that should define learning. This may be because schools have lost a sense of what really works in terms of motivating students to learn. </a:t>
             </a:r>
-            <a:pPr indent="0" marL="0">
-              <a:lnSpc>
-                <a:spcPct val="120000"/>
-              </a:lnSpc>
-              <a:buNone/>
-            </a:pPr>
             <a:r>
               <a:rPr lang="en-US" sz="1500" i="1" dirty="0">
                 <a:solidFill>
@@ -10466,12 +10442,6 @@
               </a:rPr>
               <a:t>Do you remember trying to learn how to ride a bike? It was exciting, blood rushing, and challenging, but worth it. When you got going but fell, you got back up and went a little further each time. You had more motivation to keep going because it was exciting. Schools today seem to lack this sense of excitement. Students have zero motivation to keep going because there is no excitement from the teachers and no sense of an end goal for the students. Shouldn't the process of learning be inspiring and exciting for everyone? </a:t>
             </a:r>
-            <a:pPr indent="0" marL="0">
-              <a:lnSpc>
-                <a:spcPct val="120000"/>
-              </a:lnSpc>
-              <a:buNone/>
-            </a:pPr>
             <a:r>
               <a:rPr lang="en-US" sz="1700" i="1" dirty="0">
                 <a:solidFill>
@@ -10665,7 +10635,7 @@
       </p:sp>
       <p:pic>
         <p:nvPicPr>
-          <p:cNvPr id="5" name="Image 0" descr="/home/user/yawp/services/web-app/scripts/thesis-essay-decks/assets/icons/question.png">    </p:cNvPr>
+          <p:cNvPr id="5" name="Image 0" descr="question icon">    </p:cNvPr>
           <p:cNvPicPr>
             <a:picLocks noChangeAspect="1"/>
           </p:cNvPicPr>
@@ -11598,12 +11568,6 @@
               </a:rPr>
               <a:t>Albert Einstein once said, “It is the supreme art of the teacher to awaken joy in creative expression and knowledge.” But walk into most American classrooms today and you'll find the opposite: students mechanically filling out worksheets while teachers follow rigid scripts designed to meet testing requirements. The joy Einstein spoke of has been replaced by compliance and conformity. Both students and educators go through the motions of learning without the spark of curiosity or discovery that should drive education. </a:t>
             </a:r>
-            <a:pPr indent="0" marL="0">
-              <a:lnSpc>
-                <a:spcPct val="120000"/>
-              </a:lnSpc>
-              <a:buNone/>
-            </a:pPr>
             <a:r>
               <a:rPr lang="en-US" sz="1700" i="1" dirty="0">
                 <a:solidFill>
@@ -11906,12 +11870,6 @@
               </a:rPr>
               <a:t>Education, by definition, is the process of facilitating learning, or the acquisition of knowledge, skills, values, and habits. This definition suggests an active, dynamic exchange between teacher and student—a collaborative journey of discovery and growth. However, in many of today's classrooms, education has become something far more mechanical: the transfer of standardized information from textbook to test, with little regard for genuine understanding or intellectual curiosity. Students sit in rows, passively receiving information they'll quickly forget after the exam, while teachers feel constrained by rigid curricula that leave no room for innovation. This results in ineffective learning environments. </a:t>
             </a:r>
-            <a:pPr indent="0" marL="0">
-              <a:lnSpc>
-                <a:spcPct val="120000"/>
-              </a:lnSpc>
-              <a:buNone/>
-            </a:pPr>
             <a:r>
               <a:rPr lang="en-US" sz="1500" i="1" dirty="0">
                 <a:solidFill>
@@ -12105,7 +12063,7 @@
       </p:sp>
       <p:pic>
         <p:nvPicPr>
-          <p:cNvPr id="5" name="Image 0" descr="/home/user/yawp/services/web-app/scripts/thesis-essay-decks/assets/icons/puzzle.png">    </p:cNvPr>
+          <p:cNvPr id="5" name="Image 0" descr="puzzle icon">    </p:cNvPr>
           <p:cNvPicPr>
             <a:picLocks noChangeAspect="1"/>
           </p:cNvPicPr>
@@ -12481,12 +12439,6 @@
               </a:rPr>
               <a:t>final sentence of your introduction is your thesis statement!</a:t>
             </a:r>
-            <a:pPr indent="0" marL="0">
-              <a:lnSpc>
-                <a:spcPct val="120000"/>
-              </a:lnSpc>
-              <a:buNone/>
-            </a:pPr>
             <a:r>
               <a:rPr lang="en-US" sz="1800" dirty="0">
                 <a:solidFill>
@@ -12689,7 +12641,7 @@
       </p:sp>
       <p:pic>
         <p:nvPicPr>
-          <p:cNvPr id="5" name="Image 0" descr="/home/user/yawp/services/web-app/scripts/thesis-essay-decks/assets/yawp-editor-introduction.png">    </p:cNvPr>
+          <p:cNvPr id="5" name="Image 0" descr="The YAWP! editor on the Introduction step.">    </p:cNvPr>
           <p:cNvPicPr>
             <a:picLocks noChangeAspect="1"/>
           </p:cNvPicPr>
@@ -12771,9 +12723,6 @@
               </a:rPr>
               <a:t>The Tutor says </a:t>
             </a:r>
-            <a:pPr indent="0" marL="0">
-              <a:buNone/>
-            </a:pPr>
             <a:r>
               <a:rPr lang="en-US" sz="2000" dirty="0">
                 <a:solidFill>
@@ -13201,7 +13150,7 @@
       </p:sp>
       <p:pic>
         <p:nvPicPr>
-          <p:cNvPr id="6" name="Image 0" descr="/home/user/yawp/services/web-app/scripts/thesis-essay-decks/assets/icons/lightbulb.png">    </p:cNvPr>
+          <p:cNvPr id="6" name="Image 0" descr="lightbulb icon">    </p:cNvPr>
           <p:cNvPicPr>
             <a:picLocks noChangeAspect="1"/>
           </p:cNvPicPr>
@@ -13250,7 +13199,7 @@
       </p:sp>
       <p:pic>
         <p:nvPicPr>
-          <p:cNvPr id="8" name="Image 1" descr="/home/user/yawp/services/web-app/scripts/thesis-essay-decks/assets/icons/puzzle.png">    </p:cNvPr>
+          <p:cNvPr id="8" name="Image 1" descr="puzzle icon">    </p:cNvPr>
           <p:cNvPicPr>
             <a:picLocks noChangeAspect="1"/>
           </p:cNvPicPr>
@@ -13299,7 +13248,7 @@
       </p:sp>
       <p:pic>
         <p:nvPicPr>
-          <p:cNvPr id="10" name="Image 2" descr="/home/user/yawp/services/web-app/scripts/thesis-essay-decks/assets/icons/thumbs.png">    </p:cNvPr>
+          <p:cNvPr id="10" name="Image 2" descr="thumbs icon">    </p:cNvPr>
           <p:cNvPicPr>
             <a:picLocks noChangeAspect="1"/>
           </p:cNvPicPr>
@@ -13663,7 +13612,7 @@
       </p:sp>
       <p:pic>
         <p:nvPicPr>
-          <p:cNvPr id="5" name="Image 0" descr="/home/user/yawp/services/web-app/scripts/thesis-essay-decks/assets/icons/question.png">    </p:cNvPr>
+          <p:cNvPr id="5" name="Image 0" descr="question icon">    </p:cNvPr>
           <p:cNvPicPr>
             <a:picLocks noChangeAspect="1"/>
           </p:cNvPicPr>
@@ -14490,7 +14439,7 @@
       </p:sp>
       <p:pic>
         <p:nvPicPr>
-          <p:cNvPr id="5" name="Image 0" descr="/home/user/yawp/services/web-app/scripts/thesis-essay-decks/assets/icons/question.png">    </p:cNvPr>
+          <p:cNvPr id="5" name="Image 0" descr="question icon">    </p:cNvPr>
           <p:cNvPicPr>
             <a:picLocks noChangeAspect="1"/>
           </p:cNvPicPr>
@@ -15314,7 +15263,7 @@
       </p:sp>
       <p:pic>
         <p:nvPicPr>
-          <p:cNvPr id="5" name="Image 0" descr="/home/user/yawp/services/web-app/scripts/thesis-essay-decks/assets/icons/question.png">    </p:cNvPr>
+          <p:cNvPr id="5" name="Image 0" descr="question icon">    </p:cNvPr>
           <p:cNvPicPr>
             <a:picLocks noChangeAspect="1"/>
           </p:cNvPicPr>
@@ -16141,7 +16090,7 @@
       </p:sp>
       <p:pic>
         <p:nvPicPr>
-          <p:cNvPr id="5" name="Image 0" descr="/home/user/yawp/services/web-app/scripts/thesis-essay-decks/assets/icons/question.png">    </p:cNvPr>
+          <p:cNvPr id="5" name="Image 0" descr="question icon">    </p:cNvPr>
           <p:cNvPicPr>
             <a:picLocks noChangeAspect="1"/>
           </p:cNvPicPr>
@@ -16965,7 +16914,7 @@
       </p:sp>
       <p:pic>
         <p:nvPicPr>
-          <p:cNvPr id="5" name="Image 0" descr="/home/user/yawp/services/web-app/scripts/thesis-essay-decks/assets/icons/question.png">    </p:cNvPr>
+          <p:cNvPr id="5" name="Image 0" descr="question icon">    </p:cNvPr>
           <p:cNvPicPr>
             <a:picLocks noChangeAspect="1"/>
           </p:cNvPicPr>
@@ -17792,7 +17741,7 @@
       </p:sp>
       <p:pic>
         <p:nvPicPr>
-          <p:cNvPr id="5" name="Image 0" descr="/home/user/yawp/services/web-app/scripts/thesis-essay-decks/assets/icons/question.png">    </p:cNvPr>
+          <p:cNvPr id="5" name="Image 0" descr="question icon">    </p:cNvPr>
           <p:cNvPicPr>
             <a:picLocks noChangeAspect="1"/>
           </p:cNvPicPr>
@@ -18616,7 +18565,7 @@
       </p:sp>
       <p:pic>
         <p:nvPicPr>
-          <p:cNvPr id="5" name="Image 0" descr="/home/user/yawp/services/web-app/scripts/thesis-essay-decks/assets/icons/question.png">    </p:cNvPr>
+          <p:cNvPr id="5" name="Image 0" descr="question icon">    </p:cNvPr>
           <p:cNvPicPr>
             <a:picLocks noChangeAspect="1"/>
           </p:cNvPicPr>

--- a/services/web-app/resources/thesis-essay-decks/lesson-4-introduction.pptx
+++ b/services/web-app/resources/thesis-essay-decks/lesson-4-introduction.pptx
@@ -3604,7 +3604,7 @@
               <a:buNone/>
             </a:pPr>
             <a:r>
-              <a:rPr lang="en-US" sz="1300" b="1" spc="200" kern="0" dirty="0">
+              <a:rPr lang="en-US" sz="1300" b="1" dirty="0">
                 <a:solidFill>
                   <a:srgbClr val="02BDC7"/>
                 </a:solidFill>
@@ -3612,7 +3612,7 @@
                 <a:ea typeface="Consolas" pitchFamily="34" charset="-122"/>
                 <a:cs typeface="Consolas" pitchFamily="34" charset="-120"/>
               </a:rPr>
-              <a:t>THESIS-DRIVEN ESSAY · LESSON 4</a:t>
+              <a:t>Thesis-Driven Essay · Lesson 4</a:t>
             </a:r>
             <a:endParaRPr lang="en-US" sz="1300" dirty="0"/>
           </a:p>
@@ -3922,7 +3922,7 @@
               <a:buNone/>
             </a:pPr>
             <a:r>
-              <a:rPr lang="en-US" sz="1200" b="1" spc="200" kern="0" dirty="0">
+              <a:rPr lang="en-US" sz="1200" b="1" dirty="0">
                 <a:solidFill>
                   <a:srgbClr val="FC4067"/>
                 </a:solidFill>
@@ -3930,7 +3930,7 @@
                 <a:ea typeface="Consolas" pitchFamily="34" charset="-122"/>
                 <a:cs typeface="Consolas" pitchFamily="34" charset="-120"/>
               </a:rPr>
-              <a:t>REVIEW · 4 OF 4</a:t>
+              <a:t>Review · 4 of 4</a:t>
             </a:r>
             <a:endParaRPr lang="en-US" sz="1200" dirty="0"/>
           </a:p>
@@ -4749,7 +4749,7 @@
               <a:buNone/>
             </a:pPr>
             <a:r>
-              <a:rPr lang="en-US" sz="1200" b="1" spc="200" kern="0" dirty="0">
+              <a:rPr lang="en-US" sz="1200" b="1" dirty="0">
                 <a:solidFill>
                   <a:srgbClr val="02BDC7"/>
                 </a:solidFill>
@@ -4757,7 +4757,7 @@
                 <a:ea typeface="Consolas" pitchFamily="34" charset="-122"/>
                 <a:cs typeface="Consolas" pitchFamily="34" charset="-120"/>
               </a:rPr>
-              <a:t>WARM-UP</a:t>
+              <a:t>Warm-up</a:t>
             </a:r>
             <a:endParaRPr lang="en-US" sz="1200" dirty="0"/>
           </a:p>
@@ -5685,7 +5685,7 @@
               <a:buNone/>
             </a:pPr>
             <a:r>
-              <a:rPr lang="en-US" sz="1200" b="1" spc="200" kern="0" dirty="0">
+              <a:rPr lang="en-US" sz="1200" b="1" dirty="0">
                 <a:solidFill>
                   <a:srgbClr val="02BDC7"/>
                 </a:solidFill>
@@ -5693,7 +5693,7 @@
                 <a:ea typeface="Consolas" pitchFamily="34" charset="-122"/>
                 <a:cs typeface="Consolas" pitchFamily="34" charset="-120"/>
               </a:rPr>
-              <a:t>WARM-UP · REVEAL</a:t>
+              <a:t>Warm-up · reveal</a:t>
             </a:r>
             <a:endParaRPr lang="en-US" sz="1200" dirty="0"/>
           </a:p>
@@ -6894,7 +6894,7 @@
               <a:buNone/>
             </a:pPr>
             <a:r>
-              <a:rPr lang="en-US" sz="1200" b="1" spc="200" kern="0" dirty="0">
+              <a:rPr lang="en-US" sz="1200" b="1" dirty="0">
                 <a:solidFill>
                   <a:srgbClr val="FC4540"/>
                 </a:solidFill>
@@ -6902,7 +6902,7 @@
                 <a:ea typeface="Consolas" pitchFamily="34" charset="-122"/>
                 <a:cs typeface="Consolas" pitchFamily="34" charset="-120"/>
               </a:rPr>
-              <a:t>WARM-UP, ROUND 2</a:t>
+              <a:t>Warm-up, round 2</a:t>
             </a:r>
             <a:endParaRPr lang="en-US" sz="1200" dirty="0"/>
           </a:p>
@@ -7634,7 +7634,7 @@
               <a:buNone/>
             </a:pPr>
             <a:r>
-              <a:rPr lang="en-US" sz="1200" b="1" spc="200" kern="0" dirty="0">
+              <a:rPr lang="en-US" sz="1200" b="1" dirty="0">
                 <a:solidFill>
                   <a:srgbClr val="FC4540"/>
                 </a:solidFill>
@@ -7642,7 +7642,7 @@
                 <a:ea typeface="Consolas" pitchFamily="34" charset="-122"/>
                 <a:cs typeface="Consolas" pitchFamily="34" charset="-120"/>
               </a:rPr>
-              <a:t>WARM-UP, ROUND 2 · REVEAL</a:t>
+              <a:t>Warm-up, round 2 · reveal</a:t>
             </a:r>
             <a:endParaRPr lang="en-US" sz="1200" dirty="0"/>
           </a:p>
@@ -9638,7 +9638,7 @@
               <a:buNone/>
             </a:pPr>
             <a:r>
-              <a:rPr lang="en-US" sz="1200" b="1" spc="200" kern="0" dirty="0">
+              <a:rPr lang="en-US" sz="1200" b="1" dirty="0">
                 <a:solidFill>
                   <a:srgbClr val="02BDC7"/>
                 </a:solidFill>
@@ -9646,7 +9646,7 @@
                 <a:ea typeface="Consolas" pitchFamily="34" charset="-122"/>
                 <a:cs typeface="Consolas" pitchFamily="34" charset="-120"/>
               </a:rPr>
-              <a:t>INTRODUCTION PARAGRAPH</a:t>
+              <a:t>Introduction paragraph</a:t>
             </a:r>
             <a:endParaRPr lang="en-US" sz="1200" dirty="0"/>
           </a:p>
@@ -9969,7 +9969,7 @@
               <a:buNone/>
             </a:pPr>
             <a:r>
-              <a:rPr lang="en-US" sz="1200" b="1" spc="200" kern="0" dirty="0">
+              <a:rPr lang="en-US" sz="1200" b="1" dirty="0">
                 <a:solidFill>
                   <a:srgbClr val="FFB600"/>
                 </a:solidFill>
@@ -9977,7 +9977,7 @@
                 <a:ea typeface="Consolas" pitchFamily="34" charset="-122"/>
                 <a:cs typeface="Consolas" pitchFamily="34" charset="-120"/>
               </a:rPr>
-              <a:t>CHOOSE ONE</a:t>
+              <a:t>Choose one</a:t>
             </a:r>
             <a:endParaRPr lang="en-US" sz="1200" dirty="0"/>
           </a:p>
@@ -10867,7 +10867,7 @@
               <a:buNone/>
             </a:pPr>
             <a:r>
-              <a:rPr lang="en-US" sz="1200" b="1" spc="200" kern="0" dirty="0">
+              <a:rPr lang="en-US" sz="1200" b="1" dirty="0">
                 <a:solidFill>
                   <a:srgbClr val="02BDC7"/>
                 </a:solidFill>
@@ -10875,7 +10875,7 @@
                 <a:ea typeface="Consolas" pitchFamily="34" charset="-122"/>
                 <a:cs typeface="Consolas" pitchFamily="34" charset="-120"/>
               </a:rPr>
-              <a:t>STYLE 1</a:t>
+              <a:t>Style 1</a:t>
             </a:r>
             <a:endParaRPr lang="en-US" sz="1200" dirty="0"/>
           </a:p>
@@ -11723,7 +11723,7 @@
               <a:buNone/>
             </a:pPr>
             <a:r>
-              <a:rPr lang="en-US" sz="1200" b="1" spc="200" kern="0" dirty="0">
+              <a:rPr lang="en-US" sz="1200" b="1" dirty="0">
                 <a:solidFill>
                   <a:srgbClr val="02BDC7"/>
                 </a:solidFill>
@@ -11731,7 +11731,7 @@
                 <a:ea typeface="Consolas" pitchFamily="34" charset="-122"/>
                 <a:cs typeface="Consolas" pitchFamily="34" charset="-120"/>
               </a:rPr>
-              <a:t>STYLE 2</a:t>
+              <a:t>Style 2</a:t>
             </a:r>
             <a:endParaRPr lang="en-US" sz="1200" dirty="0"/>
           </a:p>
@@ -12025,7 +12025,7 @@
               <a:buNone/>
             </a:pPr>
             <a:r>
-              <a:rPr lang="en-US" sz="1200" b="1" spc="200" kern="0" dirty="0">
+              <a:rPr lang="en-US" sz="1200" b="1" dirty="0">
                 <a:solidFill>
                   <a:srgbClr val="02BDC7"/>
                 </a:solidFill>
@@ -12033,7 +12033,7 @@
                 <a:ea typeface="Consolas" pitchFamily="34" charset="-122"/>
                 <a:cs typeface="Consolas" pitchFamily="34" charset="-120"/>
               </a:rPr>
-              <a:t>STYLE 3</a:t>
+              <a:t>Style 3</a:t>
             </a:r>
             <a:endParaRPr lang="en-US" sz="1200" dirty="0"/>
           </a:p>
@@ -12327,7 +12327,7 @@
               <a:buNone/>
             </a:pPr>
             <a:r>
-              <a:rPr lang="en-US" sz="1200" b="1" spc="200" kern="0" dirty="0">
+              <a:rPr lang="en-US" sz="1200" b="1" dirty="0">
                 <a:solidFill>
                   <a:srgbClr val="02BDC7"/>
                 </a:solidFill>
@@ -12335,7 +12335,7 @@
                 <a:ea typeface="Consolas" pitchFamily="34" charset="-122"/>
                 <a:cs typeface="Consolas" pitchFamily="34" charset="-120"/>
               </a:rPr>
-              <a:t>STYLE 4</a:t>
+              <a:t>Style 4</a:t>
             </a:r>
             <a:endParaRPr lang="en-US" sz="1200" dirty="0"/>
           </a:p>
@@ -12629,7 +12629,7 @@
               <a:buNone/>
             </a:pPr>
             <a:r>
-              <a:rPr lang="en-US" sz="1200" b="1" spc="200" kern="0" dirty="0">
+              <a:rPr lang="en-US" sz="1200" b="1" dirty="0">
                 <a:solidFill>
                   <a:srgbClr val="FF9755"/>
                 </a:solidFill>
@@ -12637,7 +12637,7 @@
                 <a:ea typeface="Consolas" pitchFamily="34" charset="-122"/>
                 <a:cs typeface="Consolas" pitchFamily="34" charset="-120"/>
               </a:rPr>
-              <a:t>WRITING ACTIVITY</a:t>
+              <a:t>Writing activity</a:t>
             </a:r>
             <a:endParaRPr lang="en-US" sz="1200" dirty="0"/>
           </a:p>
@@ -13189,7 +13189,7 @@
               <a:buNone/>
             </a:pPr>
             <a:r>
-              <a:rPr lang="en-US" sz="1200" b="1" spc="200" kern="0" dirty="0">
+              <a:rPr lang="en-US" sz="1200" b="1" dirty="0">
                 <a:solidFill>
                   <a:srgbClr val="FFB600"/>
                 </a:solidFill>
@@ -13197,7 +13197,7 @@
                 <a:ea typeface="Consolas" pitchFamily="34" charset="-122"/>
                 <a:cs typeface="Consolas" pitchFamily="34" charset="-120"/>
               </a:rPr>
-              <a:t>YOUR TURN</a:t>
+              <a:t>Your turn</a:t>
             </a:r>
             <a:endParaRPr lang="en-US" sz="1200" dirty="0"/>
           </a:p>
@@ -14637,7 +14637,7 @@
               <a:buNone/>
             </a:pPr>
             <a:r>
-              <a:rPr lang="en-US" sz="1200" b="1" spc="200" kern="0" dirty="0">
+              <a:rPr lang="en-US" sz="1200" b="1" dirty="0">
                 <a:solidFill>
                   <a:srgbClr val="FC4540"/>
                 </a:solidFill>
@@ -14645,7 +14645,7 @@
                 <a:ea typeface="Consolas" pitchFamily="34" charset="-122"/>
                 <a:cs typeface="Consolas" pitchFamily="34" charset="-120"/>
               </a:rPr>
-              <a:t>REVIEW · 1 OF 4</a:t>
+              <a:t>Review · 1 of 4</a:t>
             </a:r>
             <a:endParaRPr lang="en-US" sz="1200" dirty="0"/>
           </a:p>
@@ -15461,7 +15461,7 @@
               <a:buNone/>
             </a:pPr>
             <a:r>
-              <a:rPr lang="en-US" sz="1200" b="1" spc="200" kern="0" dirty="0">
+              <a:rPr lang="en-US" sz="1200" b="1" dirty="0">
                 <a:solidFill>
                   <a:srgbClr val="FF9755"/>
                 </a:solidFill>
@@ -15469,7 +15469,7 @@
                 <a:ea typeface="Consolas" pitchFamily="34" charset="-122"/>
                 <a:cs typeface="Consolas" pitchFamily="34" charset="-120"/>
               </a:rPr>
-              <a:t>REVIEW · 1 OF 4</a:t>
+              <a:t>Review · 1 of 4</a:t>
             </a:r>
             <a:endParaRPr lang="en-US" sz="1200" dirty="0"/>
           </a:p>
@@ -16288,7 +16288,7 @@
               <a:buNone/>
             </a:pPr>
             <a:r>
-              <a:rPr lang="en-US" sz="1200" b="1" spc="200" kern="0" dirty="0">
+              <a:rPr lang="en-US" sz="1200" b="1" dirty="0">
                 <a:solidFill>
                   <a:srgbClr val="FC4067"/>
                 </a:solidFill>
@@ -16296,7 +16296,7 @@
                 <a:ea typeface="Consolas" pitchFamily="34" charset="-122"/>
                 <a:cs typeface="Consolas" pitchFamily="34" charset="-120"/>
               </a:rPr>
-              <a:t>REVIEW · 2 OF 4</a:t>
+              <a:t>Review · 2 of 4</a:t>
             </a:r>
             <a:endParaRPr lang="en-US" sz="1200" dirty="0"/>
           </a:p>
@@ -17112,7 +17112,7 @@
               <a:buNone/>
             </a:pPr>
             <a:r>
-              <a:rPr lang="en-US" sz="1200" b="1" spc="200" kern="0" dirty="0">
+              <a:rPr lang="en-US" sz="1200" b="1" dirty="0">
                 <a:solidFill>
                   <a:srgbClr val="02BDC7"/>
                 </a:solidFill>
@@ -17120,7 +17120,7 @@
                 <a:ea typeface="Consolas" pitchFamily="34" charset="-122"/>
                 <a:cs typeface="Consolas" pitchFamily="34" charset="-120"/>
               </a:rPr>
-              <a:t>REVIEW · 2 OF 4</a:t>
+              <a:t>Review · 2 of 4</a:t>
             </a:r>
             <a:endParaRPr lang="en-US" sz="1200" dirty="0"/>
           </a:p>
@@ -17939,7 +17939,7 @@
               <a:buNone/>
             </a:pPr>
             <a:r>
-              <a:rPr lang="en-US" sz="1200" b="1" spc="200" kern="0" dirty="0">
+              <a:rPr lang="en-US" sz="1200" b="1" dirty="0">
                 <a:solidFill>
                   <a:srgbClr val="FFB600"/>
                 </a:solidFill>
@@ -17947,7 +17947,7 @@
                 <a:ea typeface="Consolas" pitchFamily="34" charset="-122"/>
                 <a:cs typeface="Consolas" pitchFamily="34" charset="-120"/>
               </a:rPr>
-              <a:t>REVIEW · 3 OF 4</a:t>
+              <a:t>Review · 3 of 4</a:t>
             </a:r>
             <a:endParaRPr lang="en-US" sz="1200" dirty="0"/>
           </a:p>
@@ -18763,7 +18763,7 @@
               <a:buNone/>
             </a:pPr>
             <a:r>
-              <a:rPr lang="en-US" sz="1200" b="1" spc="200" kern="0" dirty="0">
+              <a:rPr lang="en-US" sz="1200" b="1" dirty="0">
                 <a:solidFill>
                   <a:srgbClr val="FC4540"/>
                 </a:solidFill>
@@ -18771,7 +18771,7 @@
                 <a:ea typeface="Consolas" pitchFamily="34" charset="-122"/>
                 <a:cs typeface="Consolas" pitchFamily="34" charset="-120"/>
               </a:rPr>
-              <a:t>REVIEW · 3 OF 4</a:t>
+              <a:t>Review · 3 of 4</a:t>
             </a:r>
             <a:endParaRPr lang="en-US" sz="1200" dirty="0"/>
           </a:p>
@@ -19590,7 +19590,7 @@
               <a:buNone/>
             </a:pPr>
             <a:r>
-              <a:rPr lang="en-US" sz="1200" b="1" spc="200" kern="0" dirty="0">
+              <a:rPr lang="en-US" sz="1200" b="1" dirty="0">
                 <a:solidFill>
                   <a:srgbClr val="FF9755"/>
                 </a:solidFill>
@@ -19598,7 +19598,7 @@
                 <a:ea typeface="Consolas" pitchFamily="34" charset="-122"/>
                 <a:cs typeface="Consolas" pitchFamily="34" charset="-120"/>
               </a:rPr>
-              <a:t>REVIEW · 4 OF 4</a:t>
+              <a:t>Review · 4 of 4</a:t>
             </a:r>
             <a:endParaRPr lang="en-US" sz="1200" dirty="0"/>
           </a:p>
